--- a/topic-1/talk-1/FS2-intro.pptx
+++ b/topic-1/talk-1/FS2-intro.pptx
@@ -6252,7 +6252,7 @@
           <a:p>
             <a:fld id="{7FA44F20-A97B-47AA-A242-987ACB3E7403}" type="datetimeFigureOut">
               <a:rPr lang="en-IE" smtClean="0"/>
-              <a:t>09/01/2025</a:t>
+              <a:t>16/01/2026</a:t>
             </a:fld>
             <a:endParaRPr lang="en-IE"/>
           </a:p>
@@ -6452,7 +6452,7 @@
           <a:p>
             <a:fld id="{7FA44F20-A97B-47AA-A242-987ACB3E7403}" type="datetimeFigureOut">
               <a:rPr lang="en-IE" smtClean="0"/>
-              <a:t>09/01/2025</a:t>
+              <a:t>16/01/2026</a:t>
             </a:fld>
             <a:endParaRPr lang="en-IE"/>
           </a:p>
@@ -6662,7 +6662,7 @@
           <a:p>
             <a:fld id="{7FA44F20-A97B-47AA-A242-987ACB3E7403}" type="datetimeFigureOut">
               <a:rPr lang="en-IE" smtClean="0"/>
-              <a:t>09/01/2025</a:t>
+              <a:t>16/01/2026</a:t>
             </a:fld>
             <a:endParaRPr lang="en-IE"/>
           </a:p>
@@ -6862,7 +6862,7 @@
           <a:p>
             <a:fld id="{7FA44F20-A97B-47AA-A242-987ACB3E7403}" type="datetimeFigureOut">
               <a:rPr lang="en-IE" smtClean="0"/>
-              <a:t>09/01/2025</a:t>
+              <a:t>16/01/2026</a:t>
             </a:fld>
             <a:endParaRPr lang="en-IE"/>
           </a:p>
@@ -7138,7 +7138,7 @@
           <a:p>
             <a:fld id="{7FA44F20-A97B-47AA-A242-987ACB3E7403}" type="datetimeFigureOut">
               <a:rPr lang="en-IE" smtClean="0"/>
-              <a:t>09/01/2025</a:t>
+              <a:t>16/01/2026</a:t>
             </a:fld>
             <a:endParaRPr lang="en-IE"/>
           </a:p>
@@ -7406,7 +7406,7 @@
           <a:p>
             <a:fld id="{7FA44F20-A97B-47AA-A242-987ACB3E7403}" type="datetimeFigureOut">
               <a:rPr lang="en-IE" smtClean="0"/>
-              <a:t>09/01/2025</a:t>
+              <a:t>16/01/2026</a:t>
             </a:fld>
             <a:endParaRPr lang="en-IE"/>
           </a:p>
@@ -7821,7 +7821,7 @@
           <a:p>
             <a:fld id="{7FA44F20-A97B-47AA-A242-987ACB3E7403}" type="datetimeFigureOut">
               <a:rPr lang="en-IE" smtClean="0"/>
-              <a:t>09/01/2025</a:t>
+              <a:t>16/01/2026</a:t>
             </a:fld>
             <a:endParaRPr lang="en-IE"/>
           </a:p>
@@ -7963,7 +7963,7 @@
           <a:p>
             <a:fld id="{7FA44F20-A97B-47AA-A242-987ACB3E7403}" type="datetimeFigureOut">
               <a:rPr lang="en-IE" smtClean="0"/>
-              <a:t>09/01/2025</a:t>
+              <a:t>16/01/2026</a:t>
             </a:fld>
             <a:endParaRPr lang="en-IE"/>
           </a:p>
@@ -8076,7 +8076,7 @@
           <a:p>
             <a:fld id="{7FA44F20-A97B-47AA-A242-987ACB3E7403}" type="datetimeFigureOut">
               <a:rPr lang="en-IE" smtClean="0"/>
-              <a:t>09/01/2025</a:t>
+              <a:t>16/01/2026</a:t>
             </a:fld>
             <a:endParaRPr lang="en-IE"/>
           </a:p>
@@ -8389,7 +8389,7 @@
           <a:p>
             <a:fld id="{7FA44F20-A97B-47AA-A242-987ACB3E7403}" type="datetimeFigureOut">
               <a:rPr lang="en-IE" smtClean="0"/>
-              <a:t>09/01/2025</a:t>
+              <a:t>16/01/2026</a:t>
             </a:fld>
             <a:endParaRPr lang="en-IE"/>
           </a:p>
@@ -8678,7 +8678,7 @@
           <a:p>
             <a:fld id="{7FA44F20-A97B-47AA-A242-987ACB3E7403}" type="datetimeFigureOut">
               <a:rPr lang="en-IE" smtClean="0"/>
-              <a:t>09/01/2025</a:t>
+              <a:t>16/01/2026</a:t>
             </a:fld>
             <a:endParaRPr lang="en-IE"/>
           </a:p>
@@ -8921,7 +8921,7 @@
           <a:p>
             <a:fld id="{7FA44F20-A97B-47AA-A242-987ACB3E7403}" type="datetimeFigureOut">
               <a:rPr lang="en-IE" smtClean="0"/>
-              <a:t>09/01/2025</a:t>
+              <a:t>16/01/2026</a:t>
             </a:fld>
             <a:endParaRPr lang="en-IE"/>
           </a:p>
@@ -9418,13 +9418,13 @@
           <a:p>
             <a:r>
               <a:rPr lang="en-IE" i="1" dirty="0"/>
-              <a:t>Frank Walsh, Diarmuid O’Connor</a:t>
+              <a:t>Frank Walsh</a:t>
             </a:r>
           </a:p>
           <a:p>
             <a:r>
               <a:rPr lang="en-IE" i="1" dirty="0"/>
-              <a:t>Jan 2024</a:t>
+              <a:t>Jan 2026</a:t>
             </a:r>
           </a:p>
         </p:txBody>
@@ -11628,10 +11628,10 @@
       </p:sp>
       <p:pic>
         <p:nvPicPr>
-          <p:cNvPr id="7" name="Content Placeholder 6">
+          <p:cNvPr id="6" name="Content Placeholder 5" descr="A screenshot of a computer&#10;&#10;AI-generated content may be incorrect.">
             <a:extLst>
               <a:ext uri="{FF2B5EF4-FFF2-40B4-BE49-F238E27FC236}">
-                <a16:creationId xmlns:a16="http://schemas.microsoft.com/office/drawing/2014/main" id="{D9FE7BC4-7779-9101-8DE9-07537C35D8CA}"/>
+                <a16:creationId xmlns:a16="http://schemas.microsoft.com/office/drawing/2014/main" id="{AC778479-EA69-D870-F315-20FD2A3C356C}"/>
               </a:ext>
             </a:extLst>
           </p:cNvPr>
@@ -11650,35 +11650,8 @@
         </p:blipFill>
         <p:spPr>
           <a:xfrm>
-            <a:off x="897833" y="1506535"/>
-            <a:ext cx="7590183" cy="5221431"/>
-          </a:xfrm>
-        </p:spPr>
-      </p:pic>
-      <p:pic>
-        <p:nvPicPr>
-          <p:cNvPr id="11" name="Picture 10">
-            <a:extLst>
-              <a:ext uri="{FF2B5EF4-FFF2-40B4-BE49-F238E27FC236}">
-                <a16:creationId xmlns:a16="http://schemas.microsoft.com/office/drawing/2014/main" id="{52F422A0-4294-3F7A-372B-0529CBF48FE1}"/>
-              </a:ext>
-            </a:extLst>
-          </p:cNvPr>
-          <p:cNvPicPr>
-            <a:picLocks noChangeAspect="1"/>
-          </p:cNvPicPr>
-          <p:nvPr/>
-        </p:nvPicPr>
-        <p:blipFill>
-          <a:blip r:embed="rId3"/>
-          <a:stretch>
-            <a:fillRect/>
-          </a:stretch>
-        </p:blipFill>
-        <p:spPr>
-          <a:xfrm>
-            <a:off x="4324722" y="582855"/>
-            <a:ext cx="6683319" cy="1729890"/>
+            <a:off x="2982107" y="1465016"/>
+            <a:ext cx="6227785" cy="5109681"/>
           </a:xfrm>
           <a:prstGeom prst="rect">
             <a:avLst/>
